--- a/week2 - Routes and Layout/M8Prog laravel 03 - Layouts.pptx
+++ b/week2 - Routes and Layout/M8Prog laravel 03 - Layouts.pptx
@@ -13,7 +13,8 @@
     <p:sldId id="270" r:id="rId7"/>
     <p:sldId id="267" r:id="rId8"/>
     <p:sldId id="269" r:id="rId9"/>
-    <p:sldId id="288" r:id="rId10"/>
+    <p:sldId id="289" r:id="rId10"/>
+    <p:sldId id="288" r:id="rId11"/>
   </p:sldIdLst>
   <p:sldSz cx="12192000" cy="6858000"/>
   <p:notesSz cx="6858000" cy="9144000"/>
@@ -120,30 +121,15 @@
 </p:presentation>
 </file>
 
-<file path=ppt/revisionInfo.xml><?xml version="1.0" encoding="utf-8"?>
-<p1510:revInfo xmlns:a="http://schemas.openxmlformats.org/drawingml/2006/main" xmlns:r="http://schemas.openxmlformats.org/officeDocument/2006/relationships" xmlns:p1510="http://schemas.microsoft.com/office/powerpoint/2015/10/main">
-  <p1510:revLst>
-    <p1510:client id="{3F6328DD-8837-4FAD-9B51-2E92C5F663CA}" v="1" dt="2026-04-20T14:29:49.714"/>
-  </p1510:revLst>
-</p1510:revInfo>
-</file>
-
 <file path=ppt/changesInfos/changesInfo1.xml><?xml version="1.0" encoding="utf-8"?>
 <pc:chgInfo xmlns:a="http://schemas.openxmlformats.org/drawingml/2006/main" xmlns:r="http://schemas.openxmlformats.org/officeDocument/2006/relationships" xmlns:ac="http://schemas.microsoft.com/office/drawing/2013/main/command" xmlns:pc="http://schemas.microsoft.com/office/powerpoint/2013/main/command">
   <pc:docChgLst>
     <pc:chgData name="Dragan Javorac" userId="913c2858-fb97-4c6e-a42c-b1f1a16b225e" providerId="ADAL" clId="{BC00D9DF-F858-4149-8B7B-F211D448CEDA}"/>
     <pc:docChg chg="undo custSel addSld delSld modSld">
-      <pc:chgData name="Dragan Javorac" userId="913c2858-fb97-4c6e-a42c-b1f1a16b225e" providerId="ADAL" clId="{BC00D9DF-F858-4149-8B7B-F211D448CEDA}" dt="2026-04-20T15:04:46.136" v="551" actId="1076"/>
+      <pc:chgData name="Dragan Javorac" userId="913c2858-fb97-4c6e-a42c-b1f1a16b225e" providerId="ADAL" clId="{BC00D9DF-F858-4149-8B7B-F211D448CEDA}" dt="2026-04-23T07:03:06.976" v="626" actId="1076"/>
       <pc:docMkLst>
         <pc:docMk/>
       </pc:docMkLst>
-      <pc:sldChg chg="modSp del mod">
-        <pc:chgData name="Dragan Javorac" userId="913c2858-fb97-4c6e-a42c-b1f1a16b225e" providerId="ADAL" clId="{BC00D9DF-F858-4149-8B7B-F211D448CEDA}" dt="2026-04-20T14:29:51.556" v="542" actId="47"/>
-        <pc:sldMkLst>
-          <pc:docMk/>
-          <pc:sldMk cId="1912488285" sldId="261"/>
-        </pc:sldMkLst>
-      </pc:sldChg>
       <pc:sldChg chg="addSp delSp modSp add mod">
         <pc:chgData name="Dragan Javorac" userId="913c2858-fb97-4c6e-a42c-b1f1a16b225e" providerId="ADAL" clId="{BC00D9DF-F858-4149-8B7B-F211D448CEDA}" dt="2026-04-20T15:04:46.136" v="551" actId="1076"/>
         <pc:sldMkLst>
@@ -158,12 +144,43 @@
             <ac:picMk id="5" creationId="{83084535-B402-F0FA-B72E-CA604E155F75}"/>
           </ac:picMkLst>
         </pc:picChg>
-        <pc:picChg chg="del mod">
-          <ac:chgData name="Dragan Javorac" userId="913c2858-fb97-4c6e-a42c-b1f1a16b225e" providerId="ADAL" clId="{BC00D9DF-F858-4149-8B7B-F211D448CEDA}" dt="2026-04-20T15:04:39.016" v="545" actId="478"/>
+      </pc:sldChg>
+      <pc:sldChg chg="addSp delSp modSp add mod">
+        <pc:chgData name="Dragan Javorac" userId="913c2858-fb97-4c6e-a42c-b1f1a16b225e" providerId="ADAL" clId="{BC00D9DF-F858-4149-8B7B-F211D448CEDA}" dt="2026-04-23T07:03:06.976" v="626" actId="1076"/>
+        <pc:sldMkLst>
+          <pc:docMk/>
+          <pc:sldMk cId="3341946122" sldId="289"/>
+        </pc:sldMkLst>
+        <pc:spChg chg="mod">
+          <ac:chgData name="Dragan Javorac" userId="913c2858-fb97-4c6e-a42c-b1f1a16b225e" providerId="ADAL" clId="{BC00D9DF-F858-4149-8B7B-F211D448CEDA}" dt="2026-04-23T06:55:56.712" v="571" actId="20577"/>
+          <ac:spMkLst>
+            <pc:docMk/>
+            <pc:sldMk cId="3341946122" sldId="289"/>
+            <ac:spMk id="2" creationId="{BCDBA1FF-C879-1F99-8A4E-706D1BF8DD35}"/>
+          </ac:spMkLst>
+        </pc:spChg>
+        <pc:spChg chg="mod">
+          <ac:chgData name="Dragan Javorac" userId="913c2858-fb97-4c6e-a42c-b1f1a16b225e" providerId="ADAL" clId="{BC00D9DF-F858-4149-8B7B-F211D448CEDA}" dt="2026-04-23T06:56:07.983" v="621" actId="20577"/>
+          <ac:spMkLst>
+            <pc:docMk/>
+            <pc:sldMk cId="3341946122" sldId="289"/>
+            <ac:spMk id="3" creationId="{B921DF6A-A8D9-F49C-76C3-CF8FDCCF95F5}"/>
+          </ac:spMkLst>
+        </pc:spChg>
+        <pc:picChg chg="add mod">
+          <ac:chgData name="Dragan Javorac" userId="913c2858-fb97-4c6e-a42c-b1f1a16b225e" providerId="ADAL" clId="{BC00D9DF-F858-4149-8B7B-F211D448CEDA}" dt="2026-04-23T07:03:06.976" v="626" actId="1076"/>
           <ac:picMkLst>
             <pc:docMk/>
-            <pc:sldMk cId="1569527089" sldId="288"/>
-            <ac:picMk id="8" creationId="{2F1D0342-0340-5B9A-A896-301CDBAD8385}"/>
+            <pc:sldMk cId="3341946122" sldId="289"/>
+            <ac:picMk id="5" creationId="{7D2F07A6-B430-7C9E-0F23-1C6068E1CC8C}"/>
+          </ac:picMkLst>
+        </pc:picChg>
+        <pc:picChg chg="del">
+          <ac:chgData name="Dragan Javorac" userId="913c2858-fb97-4c6e-a42c-b1f1a16b225e" providerId="ADAL" clId="{BC00D9DF-F858-4149-8B7B-F211D448CEDA}" dt="2026-04-23T07:03:03.126" v="622" actId="478"/>
+          <ac:picMkLst>
+            <pc:docMk/>
+            <pc:sldMk cId="3341946122" sldId="289"/>
+            <ac:picMk id="13" creationId="{847F228E-3DC6-D0C5-BFC4-F163EEFD3A55}"/>
           </ac:picMkLst>
         </pc:picChg>
       </pc:sldChg>
@@ -321,7 +338,7 @@
           <a:p>
             <a:fld id="{AD36792F-A28E-4983-A7F5-F40ED51D6004}" type="datetimeFigureOut">
               <a:rPr lang="nl-NL" smtClean="0"/>
-              <a:t>20-4-2026</a:t>
+              <a:t>23-4-2026</a:t>
             </a:fld>
             <a:endParaRPr lang="nl-NL"/>
           </a:p>
@@ -521,7 +538,7 @@
           <a:p>
             <a:fld id="{AD36792F-A28E-4983-A7F5-F40ED51D6004}" type="datetimeFigureOut">
               <a:rPr lang="nl-NL" smtClean="0"/>
-              <a:t>20-4-2026</a:t>
+              <a:t>23-4-2026</a:t>
             </a:fld>
             <a:endParaRPr lang="nl-NL"/>
           </a:p>
@@ -731,7 +748,7 @@
           <a:p>
             <a:fld id="{AD36792F-A28E-4983-A7F5-F40ED51D6004}" type="datetimeFigureOut">
               <a:rPr lang="nl-NL" smtClean="0"/>
-              <a:t>20-4-2026</a:t>
+              <a:t>23-4-2026</a:t>
             </a:fld>
             <a:endParaRPr lang="nl-NL"/>
           </a:p>
@@ -931,7 +948,7 @@
           <a:p>
             <a:fld id="{AD36792F-A28E-4983-A7F5-F40ED51D6004}" type="datetimeFigureOut">
               <a:rPr lang="nl-NL" smtClean="0"/>
-              <a:t>20-4-2026</a:t>
+              <a:t>23-4-2026</a:t>
             </a:fld>
             <a:endParaRPr lang="nl-NL"/>
           </a:p>
@@ -1207,7 +1224,7 @@
           <a:p>
             <a:fld id="{AD36792F-A28E-4983-A7F5-F40ED51D6004}" type="datetimeFigureOut">
               <a:rPr lang="nl-NL" smtClean="0"/>
-              <a:t>20-4-2026</a:t>
+              <a:t>23-4-2026</a:t>
             </a:fld>
             <a:endParaRPr lang="nl-NL"/>
           </a:p>
@@ -1475,7 +1492,7 @@
           <a:p>
             <a:fld id="{AD36792F-A28E-4983-A7F5-F40ED51D6004}" type="datetimeFigureOut">
               <a:rPr lang="nl-NL" smtClean="0"/>
-              <a:t>20-4-2026</a:t>
+              <a:t>23-4-2026</a:t>
             </a:fld>
             <a:endParaRPr lang="nl-NL"/>
           </a:p>
@@ -1890,7 +1907,7 @@
           <a:p>
             <a:fld id="{AD36792F-A28E-4983-A7F5-F40ED51D6004}" type="datetimeFigureOut">
               <a:rPr lang="nl-NL" smtClean="0"/>
-              <a:t>20-4-2026</a:t>
+              <a:t>23-4-2026</a:t>
             </a:fld>
             <a:endParaRPr lang="nl-NL"/>
           </a:p>
@@ -2032,7 +2049,7 @@
           <a:p>
             <a:fld id="{AD36792F-A28E-4983-A7F5-F40ED51D6004}" type="datetimeFigureOut">
               <a:rPr lang="nl-NL" smtClean="0"/>
-              <a:t>20-4-2026</a:t>
+              <a:t>23-4-2026</a:t>
             </a:fld>
             <a:endParaRPr lang="nl-NL"/>
           </a:p>
@@ -2145,7 +2162,7 @@
           <a:p>
             <a:fld id="{AD36792F-A28E-4983-A7F5-F40ED51D6004}" type="datetimeFigureOut">
               <a:rPr lang="nl-NL" smtClean="0"/>
-              <a:t>20-4-2026</a:t>
+              <a:t>23-4-2026</a:t>
             </a:fld>
             <a:endParaRPr lang="nl-NL"/>
           </a:p>
@@ -2458,7 +2475,7 @@
           <a:p>
             <a:fld id="{AD36792F-A28E-4983-A7F5-F40ED51D6004}" type="datetimeFigureOut">
               <a:rPr lang="nl-NL" smtClean="0"/>
-              <a:t>20-4-2026</a:t>
+              <a:t>23-4-2026</a:t>
             </a:fld>
             <a:endParaRPr lang="nl-NL"/>
           </a:p>
@@ -2747,7 +2764,7 @@
           <a:p>
             <a:fld id="{AD36792F-A28E-4983-A7F5-F40ED51D6004}" type="datetimeFigureOut">
               <a:rPr lang="nl-NL" smtClean="0"/>
-              <a:t>20-4-2026</a:t>
+              <a:t>23-4-2026</a:t>
             </a:fld>
             <a:endParaRPr lang="nl-NL"/>
           </a:p>
@@ -2997,7 +3014,7 @@
           <a:p>
             <a:fld id="{AD36792F-A28E-4983-A7F5-F40ED51D6004}" type="datetimeFigureOut">
               <a:rPr lang="nl-NL" smtClean="0"/>
-              <a:t>20-4-2026</a:t>
+              <a:t>23-4-2026</a:t>
             </a:fld>
             <a:endParaRPr lang="nl-NL"/>
           </a:p>
@@ -3484,6 +3501,160 @@
 </p:sld>
 </file>
 
+<file path=ppt/slides/slide10.xml><?xml version="1.0" encoding="utf-8"?>
+<p:sld xmlns:a="http://schemas.openxmlformats.org/drawingml/2006/main" xmlns:r="http://schemas.openxmlformats.org/officeDocument/2006/relationships" xmlns:p="http://schemas.openxmlformats.org/presentationml/2006/main">
+  <p:cSld>
+    <p:spTree>
+      <p:nvGrpSpPr>
+        <p:cNvPr id="1" name="">
+          <a:extLst>
+            <a:ext uri="{FF2B5EF4-FFF2-40B4-BE49-F238E27FC236}">
+              <a16:creationId xmlns:a16="http://schemas.microsoft.com/office/drawing/2014/main" id="{7266F234-F0BE-1B32-045B-1392113FB070}"/>
+            </a:ext>
+          </a:extLst>
+        </p:cNvPr>
+        <p:cNvGrpSpPr/>
+        <p:nvPr/>
+      </p:nvGrpSpPr>
+      <p:grpSpPr>
+        <a:xfrm>
+          <a:off x="0" y="0"/>
+          <a:ext cx="0" cy="0"/>
+          <a:chOff x="0" y="0"/>
+          <a:chExt cx="0" cy="0"/>
+        </a:xfrm>
+      </p:grpSpPr>
+      <p:sp>
+        <p:nvSpPr>
+          <p:cNvPr id="2" name="Title 1">
+            <a:extLst>
+              <a:ext uri="{FF2B5EF4-FFF2-40B4-BE49-F238E27FC236}">
+                <a16:creationId xmlns:a16="http://schemas.microsoft.com/office/drawing/2014/main" id="{FAF2A692-78E3-882F-D8B1-33931901F659}"/>
+              </a:ext>
+            </a:extLst>
+          </p:cNvPr>
+          <p:cNvSpPr>
+            <a:spLocks noGrp="1"/>
+          </p:cNvSpPr>
+          <p:nvPr>
+            <p:ph type="title"/>
+          </p:nvPr>
+        </p:nvSpPr>
+        <p:spPr/>
+        <p:txBody>
+          <a:bodyPr/>
+          <a:lstStyle/>
+          <a:p>
+            <a:r>
+              <a:rPr lang="nl-NL" dirty="0"/>
+              <a:t>Week 2</a:t>
+            </a:r>
+          </a:p>
+        </p:txBody>
+      </p:sp>
+      <p:sp>
+        <p:nvSpPr>
+          <p:cNvPr id="3" name="Content Placeholder 2">
+            <a:extLst>
+              <a:ext uri="{FF2B5EF4-FFF2-40B4-BE49-F238E27FC236}">
+                <a16:creationId xmlns:a16="http://schemas.microsoft.com/office/drawing/2014/main" id="{6D2639E8-D6B9-2C26-7E9C-B98B2FFAD52C}"/>
+              </a:ext>
+            </a:extLst>
+          </p:cNvPr>
+          <p:cNvSpPr>
+            <a:spLocks noGrp="1"/>
+          </p:cNvSpPr>
+          <p:nvPr>
+            <p:ph idx="1"/>
+          </p:nvPr>
+        </p:nvSpPr>
+        <p:spPr>
+          <a:xfrm>
+            <a:off x="838200" y="1825624"/>
+            <a:ext cx="5757472" cy="4380303"/>
+          </a:xfrm>
+        </p:spPr>
+        <p:txBody>
+          <a:bodyPr/>
+          <a:lstStyle/>
+          <a:p>
+            <a:r>
+              <a:rPr lang="nl-NL" dirty="0"/>
+              <a:t>In de les en huiswerk</a:t>
+            </a:r>
+          </a:p>
+          <a:p>
+            <a:pPr lvl="1"/>
+            <a:r>
+              <a:rPr lang="nl-NL" dirty="0"/>
+              <a:t>(af voor de les volgende week)</a:t>
+            </a:r>
+            <a:endParaRPr lang="nl-NL" dirty="0">
+              <a:hlinkClick r:id="rId2"/>
+            </a:endParaRPr>
+          </a:p>
+          <a:p>
+            <a:endParaRPr lang="nl-NL" dirty="0">
+              <a:hlinkClick r:id="rId2"/>
+            </a:endParaRPr>
+          </a:p>
+          <a:p>
+            <a:r>
+              <a:rPr lang="nl-NL" dirty="0">
+                <a:hlinkClick r:id="rId3"/>
+              </a:rPr>
+              <a:t>https://github.com/progsen/m8prog_laravel/tree/main/week2</a:t>
+            </a:r>
+            <a:endParaRPr lang="nl-NL" dirty="0"/>
+          </a:p>
+          <a:p>
+            <a:endParaRPr lang="nl-NL" dirty="0"/>
+          </a:p>
+        </p:txBody>
+      </p:sp>
+      <p:pic>
+        <p:nvPicPr>
+          <p:cNvPr id="5" name="Picture 4">
+            <a:extLst>
+              <a:ext uri="{FF2B5EF4-FFF2-40B4-BE49-F238E27FC236}">
+                <a16:creationId xmlns:a16="http://schemas.microsoft.com/office/drawing/2014/main" id="{83084535-B402-F0FA-B72E-CA604E155F75}"/>
+              </a:ext>
+            </a:extLst>
+          </p:cNvPr>
+          <p:cNvPicPr>
+            <a:picLocks noChangeAspect="1"/>
+          </p:cNvPicPr>
+          <p:nvPr/>
+        </p:nvPicPr>
+        <p:blipFill>
+          <a:blip r:embed="rId4"/>
+          <a:stretch>
+            <a:fillRect/>
+          </a:stretch>
+        </p:blipFill>
+        <p:spPr>
+          <a:xfrm>
+            <a:off x="5808531" y="4101968"/>
+            <a:ext cx="6188597" cy="1989192"/>
+          </a:xfrm>
+          <a:prstGeom prst="rect">
+            <a:avLst/>
+          </a:prstGeom>
+        </p:spPr>
+      </p:pic>
+    </p:spTree>
+    <p:extLst>
+      <p:ext uri="{BB962C8B-B14F-4D97-AF65-F5344CB8AC3E}">
+        <p14:creationId xmlns:p14="http://schemas.microsoft.com/office/powerpoint/2010/main" val="1569527089"/>
+      </p:ext>
+    </p:extLst>
+  </p:cSld>
+  <p:clrMapOvr>
+    <a:masterClrMapping/>
+  </p:clrMapOvr>
+</p:sld>
+</file>
+
 <file path=ppt/slides/slide2.xml><?xml version="1.0" encoding="utf-8"?>
 <p:sld xmlns:a="http://schemas.openxmlformats.org/drawingml/2006/main" xmlns:r="http://schemas.openxmlformats.org/officeDocument/2006/relationships" xmlns:p="http://schemas.openxmlformats.org/presentationml/2006/main">
   <p:cSld>
@@ -4596,7 +4767,7 @@
         <p:cNvPr id="1" name="">
           <a:extLst>
             <a:ext uri="{FF2B5EF4-FFF2-40B4-BE49-F238E27FC236}">
-              <a16:creationId xmlns:a16="http://schemas.microsoft.com/office/drawing/2014/main" id="{7266F234-F0BE-1B32-045B-1392113FB070}"/>
+              <a16:creationId xmlns:a16="http://schemas.microsoft.com/office/drawing/2014/main" id="{83A6B375-5428-242F-EC4E-942854110681}"/>
             </a:ext>
           </a:extLst>
         </p:cNvPr>
@@ -4616,7 +4787,7 @@
           <p:cNvPr id="2" name="Title 1">
             <a:extLst>
               <a:ext uri="{FF2B5EF4-FFF2-40B4-BE49-F238E27FC236}">
-                <a16:creationId xmlns:a16="http://schemas.microsoft.com/office/drawing/2014/main" id="{FAF2A692-78E3-882F-D8B1-33931901F659}"/>
+                <a16:creationId xmlns:a16="http://schemas.microsoft.com/office/drawing/2014/main" id="{BCDBA1FF-C879-1F99-8A4E-706D1BF8DD35}"/>
               </a:ext>
             </a:extLst>
           </p:cNvPr>
@@ -4634,8 +4805,13 @@
           <a:p>
             <a:r>
               <a:rPr lang="nl-NL" dirty="0"/>
-              <a:t>Week 2</a:t>
-            </a:r>
+              <a:t>X-app-</a:t>
+            </a:r>
+            <a:r>
+              <a:rPr lang="nl-NL" dirty="0" err="1"/>
+              <a:t>layout</a:t>
+            </a:r>
+            <a:endParaRPr lang="nl-NL" dirty="0"/>
           </a:p>
         </p:txBody>
       </p:sp>
@@ -4644,7 +4820,7 @@
           <p:cNvPr id="3" name="Content Placeholder 2">
             <a:extLst>
               <a:ext uri="{FF2B5EF4-FFF2-40B4-BE49-F238E27FC236}">
-                <a16:creationId xmlns:a16="http://schemas.microsoft.com/office/drawing/2014/main" id="{6D2639E8-D6B9-2C26-7E9C-B98B2FFAD52C}"/>
+                <a16:creationId xmlns:a16="http://schemas.microsoft.com/office/drawing/2014/main" id="{B921DF6A-A8D9-F49C-76C3-CF8FDCCF95F5}"/>
               </a:ext>
             </a:extLst>
           </p:cNvPr>
@@ -4657,8 +4833,8 @@
         </p:nvSpPr>
         <p:spPr>
           <a:xfrm>
-            <a:off x="838200" y="1825624"/>
-            <a:ext cx="5757472" cy="4380303"/>
+            <a:off x="838200" y="1852785"/>
+            <a:ext cx="9971638" cy="1325563"/>
           </a:xfrm>
         </p:spPr>
         <p:txBody>
@@ -4667,34 +4843,18 @@
           <a:p>
             <a:r>
               <a:rPr lang="nl-NL" dirty="0"/>
-              <a:t>In de les en huiswerk</a:t>
-            </a:r>
-          </a:p>
-          <a:p>
-            <a:pPr lvl="1"/>
+              <a:t>Nieuwere manier</a:t>
+            </a:r>
+          </a:p>
+          <a:p>
             <a:r>
               <a:rPr lang="nl-NL" dirty="0"/>
-              <a:t>(af voor de les volgende week)</a:t>
-            </a:r>
-            <a:endParaRPr lang="nl-NL" dirty="0">
-              <a:hlinkClick r:id="rId2"/>
-            </a:endParaRPr>
-          </a:p>
-          <a:p>
-            <a:endParaRPr lang="nl-NL" dirty="0">
-              <a:hlinkClick r:id="rId2"/>
-            </a:endParaRPr>
-          </a:p>
-          <a:p>
-            <a:r>
-              <a:rPr lang="nl-NL" dirty="0">
-                <a:hlinkClick r:id="rId3"/>
-              </a:rPr>
-              <a:t>https://github.com/progsen/m8prog_laravel/tree/main/week2</a:t>
-            </a:r>
-            <a:endParaRPr lang="nl-NL" dirty="0"/>
-          </a:p>
-          <a:p>
+              <a:t>Component </a:t>
+            </a:r>
+            <a:r>
+              <a:rPr lang="nl-NL" dirty="0" err="1"/>
+              <a:t>based</a:t>
+            </a:r>
             <a:endParaRPr lang="nl-NL" dirty="0"/>
           </a:p>
         </p:txBody>
@@ -4704,7 +4864,7 @@
           <p:cNvPr id="5" name="Picture 4">
             <a:extLst>
               <a:ext uri="{FF2B5EF4-FFF2-40B4-BE49-F238E27FC236}">
-                <a16:creationId xmlns:a16="http://schemas.microsoft.com/office/drawing/2014/main" id="{83084535-B402-F0FA-B72E-CA604E155F75}"/>
+                <a16:creationId xmlns:a16="http://schemas.microsoft.com/office/drawing/2014/main" id="{7D2F07A6-B430-7C9E-0F23-1C6068E1CC8C}"/>
               </a:ext>
             </a:extLst>
           </p:cNvPr>
@@ -4714,15 +4874,15 @@
           <p:nvPr/>
         </p:nvPicPr>
         <p:blipFill>
-          <a:blip r:embed="rId4"/>
+          <a:blip r:embed="rId2"/>
           <a:stretch>
             <a:fillRect/>
           </a:stretch>
         </p:blipFill>
         <p:spPr>
           <a:xfrm>
-            <a:off x="5808531" y="4101968"/>
-            <a:ext cx="6188597" cy="1989192"/>
+            <a:off x="1591456" y="3178348"/>
+            <a:ext cx="8532526" cy="3679652"/>
           </a:xfrm>
           <a:prstGeom prst="rect">
             <a:avLst/>
@@ -4732,7 +4892,7 @@
     </p:spTree>
     <p:extLst>
       <p:ext uri="{BB962C8B-B14F-4D97-AF65-F5344CB8AC3E}">
-        <p14:creationId xmlns:p14="http://schemas.microsoft.com/office/powerpoint/2010/main" val="1569527089"/>
+        <p14:creationId xmlns:p14="http://schemas.microsoft.com/office/powerpoint/2010/main" val="3341946122"/>
       </p:ext>
     </p:extLst>
   </p:cSld>

--- a/week2 - Routes and Layout/M8Prog laravel 03 - Layouts.pptx
+++ b/week2 - Routes and Layout/M8Prog laravel 03 - Layouts.pptx
@@ -3547,7 +3547,7 @@
           <a:p>
             <a:r>
               <a:rPr lang="nl-NL" dirty="0"/>
-              <a:t>Week 2</a:t>
+              <a:t>Deze les</a:t>
             </a:r>
           </a:p>
         </p:txBody>
@@ -3580,20 +3580,12 @@
           <a:p>
             <a:r>
               <a:rPr lang="nl-NL" dirty="0"/>
-              <a:t>In de les en huiswerk</a:t>
-            </a:r>
-          </a:p>
-          <a:p>
-            <a:pPr lvl="1"/>
-            <a:r>
-              <a:rPr lang="nl-NL" dirty="0"/>
-              <a:t>(af voor de les volgende week)</a:t>
-            </a:r>
-            <a:endParaRPr lang="nl-NL" dirty="0">
-              <a:hlinkClick r:id="rId2"/>
-            </a:endParaRPr>
-          </a:p>
-          <a:p>
+              <a:t>In de les </a:t>
+            </a:r>
+            <a:r>
+              <a:rPr lang="nl-NL"/>
+              <a:t>en huiswerk</a:t>
+            </a:r>
             <a:endParaRPr lang="nl-NL" dirty="0">
               <a:hlinkClick r:id="rId2"/>
             </a:endParaRPr>
@@ -3614,10 +3606,10 @@
       </p:sp>
       <p:pic>
         <p:nvPicPr>
-          <p:cNvPr id="5" name="Picture 4">
-            <a:extLst>
-              <a:ext uri="{FF2B5EF4-FFF2-40B4-BE49-F238E27FC236}">
-                <a16:creationId xmlns:a16="http://schemas.microsoft.com/office/drawing/2014/main" id="{83084535-B402-F0FA-B72E-CA604E155F75}"/>
+          <p:cNvPr id="6" name="Picture 5">
+            <a:extLst>
+              <a:ext uri="{FF2B5EF4-FFF2-40B4-BE49-F238E27FC236}">
+                <a16:creationId xmlns:a16="http://schemas.microsoft.com/office/drawing/2014/main" id="{2CF1F400-9FC5-D586-EC0C-585F73B59B2D}"/>
               </a:ext>
             </a:extLst>
           </p:cNvPr>
@@ -3634,8 +3626,8 @@
         </p:blipFill>
         <p:spPr>
           <a:xfrm>
-            <a:off x="5808531" y="4101968"/>
-            <a:ext cx="6188597" cy="1989192"/>
+            <a:off x="4624855" y="4450601"/>
+            <a:ext cx="6272994" cy="1890262"/>
           </a:xfrm>
           <a:prstGeom prst="rect">
             <a:avLst/>
